--- a/AutomaTivio/reports/2026-08/pptx/Tivio ALT 180 - Relatório de Gestão - Agosto 2026.pptx
+++ b/AutomaTivio/reports/2026-08/pptx/Tivio ALT 180 - Relatório de Gestão - Agosto 2026.pptx
@@ -4247,7 +4247,7 @@
                           </a:solidFill>
                           <a:latin typeface="Versos"/>
                         </a:rPr>
-                        <a:t>119%</a:t>
+                        <a:t>118,88%</a:t>
                       </a:r>
                     </a:p>
                   </a:txBody>
@@ -4270,7 +4270,7 @@
                           </a:solidFill>
                           <a:latin typeface="Versos"/>
                         </a:rPr>
-                        <a:t>120%</a:t>
+                        <a:t>119,92%</a:t>
                       </a:r>
                     </a:p>
                   </a:txBody>
@@ -4293,7 +4293,7 @@
                           </a:solidFill>
                           <a:latin typeface="Versos"/>
                         </a:rPr>
-                        <a:t>124%</a:t>
+                        <a:t>124,27%</a:t>
                       </a:r>
                     </a:p>
                   </a:txBody>
@@ -4362,7 +4362,7 @@
                           </a:solidFill>
                           <a:latin typeface="Versos"/>
                         </a:rPr>
-                        <a:t>130%</a:t>
+                        <a:t>130,33%</a:t>
                       </a:r>
                     </a:p>
                   </a:txBody>
